--- a/01_분석결과/시장분석_3C_PESTEL_5Forces_SWOT.pptx
+++ b/01_분석결과/시장분석_3C_PESTEL_5Forces_SWOT.pptx
@@ -10647,7 +10647,7 @@
                 <a:ea typeface="맑은 고딕" pitchFamily="34" charset="-122"/>
                 <a:cs typeface="맑은 고딕" pitchFamily="34" charset="-120"/>
               </a:rPr>
-              <a:t>미샤 · 토니모리 · 에뛰드 · 아리따움</a:t>
+              <a:t>미샤 · 토니모리 · 에뛰드 · 아리따움 · 3CE(참고군 — 로레알 소유·색조 전문, 메타 광고 ~10건 전량 성과형·서사 0건)</a:t>
             </a:r>
             <a:endParaRPr lang="en-US" sz="1250" dirty="0"/>
           </a:p>
